--- a/classes/parte-0-prerrequisitos/048-web-scraping-con-beautifulsoup/clase-048-web-scraping-con-beautifulsoup-presentacion.pptx
+++ b/classes/parte-0-prerrequisitos/048-web-scraping-con-beautifulsoup/clase-048-web-scraping-con-beautifulsoup-presentacion.pptx
@@ -3272,7 +3272,7 @@
                 </a:solidFill>
                 <a:latin typeface="Segoe UI"/>
               </a:rPr>
-              <a:t>Parte: 0 — Prerrequisitos · Fuente: Web Scraping with Python (Mitchell, 2ª ed.) caps. 1-3 · BeautifulSoup docs. · Duración estimada: 75 min.</a:t>
+              <a:t>Parte: 0 — Prerrequisitos · Fuente: Web Scraping with Python (Mitchell, 2ª ed.) caps. 1-3 · BeautifulSoup docs. · Duración estimada: 75 min. · Nivel: Básico-Intermedio</a:t>
             </a:r>
           </a:p>
         </p:txBody>
@@ -3581,7 +3581,7 @@
                 </a:solidFill>
                 <a:latin typeface="Segoe UI"/>
               </a:rPr>
-              <a:t>Parte: 0 — Prerrequisitos · Fuente: Web Scraping with Python (Mitchell, 2ª ed.) caps. 1-3 · BeautifulSoup docs. · Duración estimada: 75 min.</a:t>
+              <a:t>Parte: 0 — Prerrequisitos · Fuente: Web Scraping with Python (Mitchell, 2ª ed.) caps. 1-3 · BeautifulSoup docs. · Duración estimada: 75 min. · Nivel: Básico-Intermedio</a:t>
             </a:r>
           </a:p>
         </p:txBody>
